--- a/HR Analytics/Report/HR Presentation Report.pptx
+++ b/HR Analytics/Report/HR Presentation Report.pptx
@@ -5,48 +5,47 @@
     <p:sldMasterId id="2147483839" r:id="rId1"/>
   </p:sldMasterIdLst>
   <p:notesMasterIdLst>
-    <p:notesMasterId r:id="rId18"/>
+    <p:notesMasterId r:id="rId17"/>
   </p:notesMasterIdLst>
   <p:sldIdLst>
     <p:sldId id="256" r:id="rId2"/>
     <p:sldId id="257" r:id="rId3"/>
     <p:sldId id="259" r:id="rId4"/>
-    <p:sldId id="266" r:id="rId5"/>
-    <p:sldId id="258" r:id="rId6"/>
-    <p:sldId id="267" r:id="rId7"/>
-    <p:sldId id="260" r:id="rId8"/>
-    <p:sldId id="269" r:id="rId9"/>
-    <p:sldId id="271" r:id="rId10"/>
-    <p:sldId id="272" r:id="rId11"/>
-    <p:sldId id="261" r:id="rId12"/>
-    <p:sldId id="268" r:id="rId13"/>
-    <p:sldId id="262" r:id="rId14"/>
-    <p:sldId id="263" r:id="rId15"/>
-    <p:sldId id="264" r:id="rId16"/>
-    <p:sldId id="265" r:id="rId17"/>
+    <p:sldId id="258" r:id="rId5"/>
+    <p:sldId id="267" r:id="rId6"/>
+    <p:sldId id="260" r:id="rId7"/>
+    <p:sldId id="269" r:id="rId8"/>
+    <p:sldId id="271" r:id="rId9"/>
+    <p:sldId id="272" r:id="rId10"/>
+    <p:sldId id="261" r:id="rId11"/>
+    <p:sldId id="268" r:id="rId12"/>
+    <p:sldId id="262" r:id="rId13"/>
+    <p:sldId id="263" r:id="rId14"/>
+    <p:sldId id="264" r:id="rId15"/>
+    <p:sldId id="265" r:id="rId16"/>
   </p:sldIdLst>
   <p:sldSz cx="18288000" cy="10287000"/>
   <p:notesSz cx="6858000" cy="9144000"/>
   <p:embeddedFontLst>
     <p:embeddedFont>
       <p:font typeface="Arapey" panose="020B0604020202020204" charset="0"/>
-      <p:regular r:id="rId19"/>
+      <p:regular r:id="rId18"/>
     </p:embeddedFont>
     <p:embeddedFont>
       <p:font typeface="Assistant" pitchFamily="2" charset="-79"/>
-      <p:regular r:id="rId20"/>
-      <p:bold r:id="rId21"/>
+      <p:regular r:id="rId19"/>
+      <p:bold r:id="rId20"/>
     </p:embeddedFont>
     <p:embeddedFont>
       <p:font typeface="Corbel" panose="020B0503020204020204" pitchFamily="34" charset="0"/>
-      <p:regular r:id="rId22"/>
-      <p:bold r:id="rId23"/>
-      <p:italic r:id="rId24"/>
-      <p:boldItalic r:id="rId25"/>
+      <p:regular r:id="rId21"/>
+      <p:bold r:id="rId22"/>
+      <p:italic r:id="rId23"/>
+      <p:boldItalic r:id="rId24"/>
     </p:embeddedFont>
     <p:embeddedFont>
       <p:font typeface="Norwester" panose="020B0604020202020204" charset="0"/>
-      <p:regular r:id="rId26"/>
+      <p:regular r:id="rId25"/>
     </p:embeddedFont>
   </p:embeddedFontLst>
   <p:defaultTextStyle>
@@ -166,9 +165,77 @@
 <file path=ppt/revisionInfo.xml><?xml version="1.0" encoding="utf-8"?>
 <p1510:revInfo xmlns:a="http://schemas.openxmlformats.org/drawingml/2006/main" xmlns:r="http://schemas.openxmlformats.org/officeDocument/2006/relationships" xmlns:p1510="http://schemas.microsoft.com/office/powerpoint/2015/10/main">
   <p1510:revLst>
+    <p1510:client id="{92BBBE8A-732F-47B3-B60B-35EFA6E0D7E5}" v="13" dt="2026-05-12T16:10:41.988"/>
     <p1510:client id="{B56012D0-5E30-46B3-9EDC-1C147A76A265}" v="122" dt="2026-05-12T04:19:20.344"/>
   </p1510:revLst>
 </p1510:revInfo>
+</file>
+
+<file path=ppt/changesInfos/changesInfo1.xml><?xml version="1.0" encoding="utf-8"?>
+<pc:chgInfo xmlns:a="http://schemas.openxmlformats.org/drawingml/2006/main" xmlns:r="http://schemas.openxmlformats.org/officeDocument/2006/relationships" xmlns:ac="http://schemas.microsoft.com/office/drawing/2013/main/command" xmlns:pc="http://schemas.microsoft.com/office/powerpoint/2013/main/command">
+  <pc:docChgLst>
+    <pc:chgData name="Praveen .S" userId="786c6a3edcadf2d4" providerId="LiveId" clId="{40FFB7B8-41FF-43E1-A09C-A49375805421}"/>
+    <pc:docChg chg="undo custSel delSld modSld">
+      <pc:chgData name="Praveen .S" userId="786c6a3edcadf2d4" providerId="LiveId" clId="{40FFB7B8-41FF-43E1-A09C-A49375805421}" dt="2026-05-12T16:11:42.344" v="228" actId="2696"/>
+      <pc:docMkLst>
+        <pc:docMk/>
+      </pc:docMkLst>
+      <pc:sldChg chg="modSp mod">
+        <pc:chgData name="Praveen .S" userId="786c6a3edcadf2d4" providerId="LiveId" clId="{40FFB7B8-41FF-43E1-A09C-A49375805421}" dt="2026-05-12T16:06:06.499" v="15" actId="20577"/>
+        <pc:sldMkLst>
+          <pc:docMk/>
+          <pc:sldMk cId="0" sldId="256"/>
+        </pc:sldMkLst>
+        <pc:spChg chg="mod">
+          <ac:chgData name="Praveen .S" userId="786c6a3edcadf2d4" providerId="LiveId" clId="{40FFB7B8-41FF-43E1-A09C-A49375805421}" dt="2026-05-12T16:06:06.499" v="15" actId="20577"/>
+          <ac:spMkLst>
+            <pc:docMk/>
+            <pc:sldMk cId="0" sldId="256"/>
+            <ac:spMk id="9" creationId="{00000000-0000-0000-0000-000000000000}"/>
+          </ac:spMkLst>
+        </pc:spChg>
+      </pc:sldChg>
+      <pc:sldChg chg="addSp delSp modSp mod">
+        <pc:chgData name="Praveen .S" userId="786c6a3edcadf2d4" providerId="LiveId" clId="{40FFB7B8-41FF-43E1-A09C-A49375805421}" dt="2026-05-12T16:11:28.351" v="227" actId="20577"/>
+        <pc:sldMkLst>
+          <pc:docMk/>
+          <pc:sldMk cId="0" sldId="257"/>
+        </pc:sldMkLst>
+        <pc:spChg chg="mod">
+          <ac:chgData name="Praveen .S" userId="786c6a3edcadf2d4" providerId="LiveId" clId="{40FFB7B8-41FF-43E1-A09C-A49375805421}" dt="2026-05-12T16:11:28.351" v="227" actId="20577"/>
+          <ac:spMkLst>
+            <pc:docMk/>
+            <pc:sldMk cId="0" sldId="257"/>
+            <ac:spMk id="82" creationId="{01BAD01E-7B41-0748-C806-7F448C5E813C}"/>
+          </ac:spMkLst>
+        </pc:spChg>
+        <pc:spChg chg="del">
+          <ac:chgData name="Praveen .S" userId="786c6a3edcadf2d4" providerId="LiveId" clId="{40FFB7B8-41FF-43E1-A09C-A49375805421}" dt="2026-05-12T16:10:46.197" v="213" actId="478"/>
+          <ac:spMkLst>
+            <pc:docMk/>
+            <pc:sldMk cId="0" sldId="257"/>
+            <ac:spMk id="87" creationId="{C035C1E3-C78E-A529-5A03-ACC32F6192C2}"/>
+          </ac:spMkLst>
+        </pc:spChg>
+        <pc:spChg chg="add del">
+          <ac:chgData name="Praveen .S" userId="786c6a3edcadf2d4" providerId="LiveId" clId="{40FFB7B8-41FF-43E1-A09C-A49375805421}" dt="2026-05-12T16:08:52.663" v="135" actId="478"/>
+          <ac:spMkLst>
+            <pc:docMk/>
+            <pc:sldMk cId="0" sldId="257"/>
+            <ac:spMk id="92" creationId="{4063181B-DBB0-59D8-7978-E3B65EB1439B}"/>
+          </ac:spMkLst>
+        </pc:spChg>
+      </pc:sldChg>
+      <pc:sldChg chg="del">
+        <pc:chgData name="Praveen .S" userId="786c6a3edcadf2d4" providerId="LiveId" clId="{40FFB7B8-41FF-43E1-A09C-A49375805421}" dt="2026-05-12T16:11:42.344" v="228" actId="2696"/>
+        <pc:sldMkLst>
+          <pc:docMk/>
+          <pc:sldMk cId="3163570248" sldId="266"/>
+        </pc:sldMkLst>
+      </pc:sldChg>
+    </pc:docChg>
+  </pc:docChgLst>
+</pc:chgInfo>
 </file>
 
 <file path=ppt/notesMasters/notesMaster1.xml><?xml version="1.0" encoding="utf-8"?>
@@ -701,7 +768,7 @@
           <a:p>
             <a:fld id="{82398167-1C6C-4A04-AAED-A169D3D68D3F}" type="slidenum">
               <a:rPr lang="en-IN" smtClean="0"/>
-              <a:t>8</a:t>
+              <a:t>7</a:t>
             </a:fld>
             <a:endParaRPr lang="en-IN"/>
           </a:p>
@@ -809,7 +876,7 @@
           <a:p>
             <a:fld id="{82398167-1C6C-4A04-AAED-A169D3D68D3F}" type="slidenum">
               <a:rPr lang="en-IN" smtClean="0"/>
-              <a:t>9</a:t>
+              <a:t>8</a:t>
             </a:fld>
             <a:endParaRPr lang="en-IN"/>
           </a:p>
@@ -917,7 +984,7 @@
           <a:p>
             <a:fld id="{82398167-1C6C-4A04-AAED-A169D3D68D3F}" type="slidenum">
               <a:rPr lang="en-IN" smtClean="0"/>
-              <a:t>10</a:t>
+              <a:t>9</a:t>
             </a:fld>
             <a:endParaRPr lang="en-IN"/>
           </a:p>
@@ -1001,7 +1068,7 @@
           <a:p>
             <a:fld id="{82398167-1C6C-4A04-AAED-A169D3D68D3F}" type="slidenum">
               <a:rPr lang="en-IN" smtClean="0"/>
-              <a:t>11</a:t>
+              <a:t>10</a:t>
             </a:fld>
             <a:endParaRPr lang="en-IN"/>
           </a:p>
@@ -1109,7 +1176,7 @@
           <a:p>
             <a:fld id="{82398167-1C6C-4A04-AAED-A169D3D68D3F}" type="slidenum">
               <a:rPr lang="en-IN" smtClean="0"/>
-              <a:t>12</a:t>
+              <a:t>11</a:t>
             </a:fld>
             <a:endParaRPr lang="en-IN"/>
           </a:p>
@@ -7831,7 +7898,7 @@
               </a:spcBef>
             </a:pPr>
             <a:r>
-              <a:rPr lang="en-US" sz="4400">
+              <a:rPr lang="en-US" sz="4400" dirty="0">
                 <a:solidFill>
                   <a:srgbClr val="000000"/>
                 </a:solidFill>
@@ -7840,7 +7907,7 @@
                 <a:cs typeface="Arapey"/>
                 <a:sym typeface="Arapey"/>
               </a:rPr>
-              <a:t>By Group 5</a:t>
+              <a:t>By Praveen s</a:t>
             </a:r>
           </a:p>
         </p:txBody>
@@ -7854,531 +7921,6 @@
 </file>
 
 <file path=ppt/slides/slide10.xml><?xml version="1.0" encoding="utf-8"?>
-<p:sld xmlns:a="http://schemas.openxmlformats.org/drawingml/2006/main" xmlns:r="http://schemas.openxmlformats.org/officeDocument/2006/relationships" xmlns:p="http://schemas.openxmlformats.org/presentationml/2006/main">
-  <p:cSld>
-    <p:spTree>
-      <p:nvGrpSpPr>
-        <p:cNvPr id="1" name="">
-          <a:extLst>
-            <a:ext uri="{FF2B5EF4-FFF2-40B4-BE49-F238E27FC236}">
-              <a16:creationId xmlns:a16="http://schemas.microsoft.com/office/drawing/2014/main" id="{02BAAE1B-BC0F-FCE8-7BF6-B113DCC9770B}"/>
-            </a:ext>
-          </a:extLst>
-        </p:cNvPr>
-        <p:cNvGrpSpPr/>
-        <p:nvPr/>
-      </p:nvGrpSpPr>
-      <p:grpSpPr>
-        <a:xfrm>
-          <a:off x="0" y="0"/>
-          <a:ext cx="0" cy="0"/>
-          <a:chOff x="0" y="0"/>
-          <a:chExt cx="0" cy="0"/>
-        </a:xfrm>
-      </p:grpSpPr>
-      <p:sp>
-        <p:nvSpPr>
-          <p:cNvPr id="2" name="Freeform 2">
-            <a:extLst>
-              <a:ext uri="{FF2B5EF4-FFF2-40B4-BE49-F238E27FC236}">
-                <a16:creationId xmlns:a16="http://schemas.microsoft.com/office/drawing/2014/main" id="{251AFD13-1E66-80A7-7A8C-A042815AE282}"/>
-              </a:ext>
-            </a:extLst>
-          </p:cNvPr>
-          <p:cNvSpPr/>
-          <p:nvPr/>
-        </p:nvSpPr>
-        <p:spPr>
-          <a:xfrm>
-            <a:off x="0" y="0"/>
-            <a:ext cx="18288000" cy="12184380"/>
-          </a:xfrm>
-          <a:custGeom>
-            <a:avLst/>
-            <a:gdLst/>
-            <a:ahLst/>
-            <a:cxnLst/>
-            <a:rect l="l" t="t" r="r" b="b"/>
-            <a:pathLst>
-              <a:path w="18288000" h="12184380">
-                <a:moveTo>
-                  <a:pt x="0" y="0"/>
-                </a:moveTo>
-                <a:lnTo>
-                  <a:pt x="18288000" y="0"/>
-                </a:lnTo>
-                <a:lnTo>
-                  <a:pt x="18288000" y="12184380"/>
-                </a:lnTo>
-                <a:lnTo>
-                  <a:pt x="0" y="12184380"/>
-                </a:lnTo>
-                <a:lnTo>
-                  <a:pt x="0" y="0"/>
-                </a:lnTo>
-                <a:close/>
-              </a:path>
-            </a:pathLst>
-          </a:custGeom>
-          <a:blipFill>
-            <a:blip r:embed="rId3">
-              <a:alphaModFix amt="26000"/>
-            </a:blip>
-            <a:stretch>
-              <a:fillRect/>
-            </a:stretch>
-          </a:blipFill>
-        </p:spPr>
-        <p:txBody>
-          <a:bodyPr/>
-          <a:lstStyle/>
-          <a:p>
-            <a:endParaRPr lang="en-IN"/>
-          </a:p>
-        </p:txBody>
-      </p:sp>
-      <p:sp>
-        <p:nvSpPr>
-          <p:cNvPr id="3" name="Freeform 3">
-            <a:extLst>
-              <a:ext uri="{FF2B5EF4-FFF2-40B4-BE49-F238E27FC236}">
-                <a16:creationId xmlns:a16="http://schemas.microsoft.com/office/drawing/2014/main" id="{BA1CEA69-6D68-4A2D-950B-24681725B69E}"/>
-              </a:ext>
-            </a:extLst>
-          </p:cNvPr>
-          <p:cNvSpPr/>
-          <p:nvPr/>
-        </p:nvSpPr>
-        <p:spPr>
-          <a:xfrm>
-            <a:off x="8173342" y="-1257300"/>
-            <a:ext cx="11109641" cy="2819072"/>
-          </a:xfrm>
-          <a:custGeom>
-            <a:avLst/>
-            <a:gdLst/>
-            <a:ahLst/>
-            <a:cxnLst/>
-            <a:rect l="l" t="t" r="r" b="b"/>
-            <a:pathLst>
-              <a:path w="11109641" h="2819072">
-                <a:moveTo>
-                  <a:pt x="0" y="0"/>
-                </a:moveTo>
-                <a:lnTo>
-                  <a:pt x="11109642" y="0"/>
-                </a:lnTo>
-                <a:lnTo>
-                  <a:pt x="11109642" y="2819071"/>
-                </a:lnTo>
-                <a:lnTo>
-                  <a:pt x="0" y="2819071"/>
-                </a:lnTo>
-                <a:lnTo>
-                  <a:pt x="0" y="0"/>
-                </a:lnTo>
-                <a:close/>
-              </a:path>
-            </a:pathLst>
-          </a:custGeom>
-          <a:blipFill>
-            <a:blip>
-              <a:extLst>
-                <a:ext uri="{96DAC541-7B7A-43D3-8B79-37D633B846F1}">
-                  <asvg:svgBlip xmlns:asvg="http://schemas.microsoft.com/office/drawing/2016/SVG/main" r:embed="rId4"/>
-                </a:ext>
-              </a:extLst>
-            </a:blip>
-            <a:stretch>
-              <a:fillRect/>
-            </a:stretch>
-          </a:blipFill>
-        </p:spPr>
-        <p:txBody>
-          <a:bodyPr/>
-          <a:lstStyle/>
-          <a:p>
-            <a:endParaRPr lang="en-IN"/>
-          </a:p>
-        </p:txBody>
-      </p:sp>
-      <p:sp>
-        <p:nvSpPr>
-          <p:cNvPr id="4" name="Freeform 4">
-            <a:extLst>
-              <a:ext uri="{FF2B5EF4-FFF2-40B4-BE49-F238E27FC236}">
-                <a16:creationId xmlns:a16="http://schemas.microsoft.com/office/drawing/2014/main" id="{4E636593-A1DD-22A9-6CED-A115106D7A55}"/>
-              </a:ext>
-            </a:extLst>
-          </p:cNvPr>
-          <p:cNvSpPr/>
-          <p:nvPr/>
-        </p:nvSpPr>
-        <p:spPr>
-          <a:xfrm rot="5519627">
-            <a:off x="15212169" y="3220447"/>
-            <a:ext cx="7280753" cy="4114800"/>
-          </a:xfrm>
-          <a:custGeom>
-            <a:avLst/>
-            <a:gdLst/>
-            <a:ahLst/>
-            <a:cxnLst/>
-            <a:rect l="l" t="t" r="r" b="b"/>
-            <a:pathLst>
-              <a:path w="7280753" h="4114800">
-                <a:moveTo>
-                  <a:pt x="0" y="0"/>
-                </a:moveTo>
-                <a:lnTo>
-                  <a:pt x="7280753" y="0"/>
-                </a:lnTo>
-                <a:lnTo>
-                  <a:pt x="7280753" y="4114800"/>
-                </a:lnTo>
-                <a:lnTo>
-                  <a:pt x="0" y="4114800"/>
-                </a:lnTo>
-                <a:lnTo>
-                  <a:pt x="0" y="0"/>
-                </a:lnTo>
-                <a:close/>
-              </a:path>
-            </a:pathLst>
-          </a:custGeom>
-          <a:blipFill>
-            <a:blip>
-              <a:extLst>
-                <a:ext uri="{96DAC541-7B7A-43D3-8B79-37D633B846F1}">
-                  <asvg:svgBlip xmlns:asvg="http://schemas.microsoft.com/office/drawing/2016/SVG/main" r:embed="rId5"/>
-                </a:ext>
-              </a:extLst>
-            </a:blip>
-            <a:stretch>
-              <a:fillRect/>
-            </a:stretch>
-          </a:blipFill>
-        </p:spPr>
-        <p:txBody>
-          <a:bodyPr/>
-          <a:lstStyle/>
-          <a:p>
-            <a:endParaRPr lang="en-IN"/>
-          </a:p>
-        </p:txBody>
-      </p:sp>
-      <p:sp>
-        <p:nvSpPr>
-          <p:cNvPr id="5" name="Freeform 5">
-            <a:extLst>
-              <a:ext uri="{FF2B5EF4-FFF2-40B4-BE49-F238E27FC236}">
-                <a16:creationId xmlns:a16="http://schemas.microsoft.com/office/drawing/2014/main" id="{A91363F6-B668-C448-FE5D-C6CAA34F9F85}"/>
-              </a:ext>
-            </a:extLst>
-          </p:cNvPr>
-          <p:cNvSpPr/>
-          <p:nvPr/>
-        </p:nvSpPr>
-        <p:spPr>
-          <a:xfrm>
-            <a:off x="0" y="6517459"/>
-            <a:ext cx="18633464" cy="9350611"/>
-          </a:xfrm>
-          <a:custGeom>
-            <a:avLst/>
-            <a:gdLst/>
-            <a:ahLst/>
-            <a:cxnLst/>
-            <a:rect l="l" t="t" r="r" b="b"/>
-            <a:pathLst>
-              <a:path w="18633464" h="9350611">
-                <a:moveTo>
-                  <a:pt x="0" y="0"/>
-                </a:moveTo>
-                <a:lnTo>
-                  <a:pt x="18633464" y="0"/>
-                </a:lnTo>
-                <a:lnTo>
-                  <a:pt x="18633464" y="9350611"/>
-                </a:lnTo>
-                <a:lnTo>
-                  <a:pt x="0" y="9350611"/>
-                </a:lnTo>
-                <a:lnTo>
-                  <a:pt x="0" y="0"/>
-                </a:lnTo>
-                <a:close/>
-              </a:path>
-            </a:pathLst>
-          </a:custGeom>
-          <a:blipFill>
-            <a:blip>
-              <a:extLst>
-                <a:ext uri="{96DAC541-7B7A-43D3-8B79-37D633B846F1}">
-                  <asvg:svgBlip xmlns:asvg="http://schemas.microsoft.com/office/drawing/2016/SVG/main" r:embed="rId6"/>
-                </a:ext>
-              </a:extLst>
-            </a:blip>
-            <a:stretch>
-              <a:fillRect/>
-            </a:stretch>
-          </a:blipFill>
-        </p:spPr>
-        <p:txBody>
-          <a:bodyPr/>
-          <a:lstStyle/>
-          <a:p>
-            <a:endParaRPr lang="en-IN"/>
-          </a:p>
-        </p:txBody>
-      </p:sp>
-      <p:grpSp>
-        <p:nvGrpSpPr>
-          <p:cNvPr id="6" name="Group 6">
-            <a:extLst>
-              <a:ext uri="{FF2B5EF4-FFF2-40B4-BE49-F238E27FC236}">
-                <a16:creationId xmlns:a16="http://schemas.microsoft.com/office/drawing/2014/main" id="{66F6CE9B-3B8E-38AA-FA5C-64B1B014F9BD}"/>
-              </a:ext>
-            </a:extLst>
-          </p:cNvPr>
-          <p:cNvGrpSpPr/>
-          <p:nvPr/>
-        </p:nvGrpSpPr>
-        <p:grpSpPr>
-          <a:xfrm>
-            <a:off x="1195457" y="967684"/>
-            <a:ext cx="15897086" cy="8351632"/>
-            <a:chOff x="0" y="0"/>
-            <a:chExt cx="4186887" cy="2199607"/>
-          </a:xfrm>
-        </p:grpSpPr>
-        <p:sp>
-          <p:nvSpPr>
-            <p:cNvPr id="7" name="Freeform 7">
-              <a:extLst>
-                <a:ext uri="{FF2B5EF4-FFF2-40B4-BE49-F238E27FC236}">
-                  <a16:creationId xmlns:a16="http://schemas.microsoft.com/office/drawing/2014/main" id="{06175BBC-F34F-407E-1A5C-381E991D734A}"/>
-                </a:ext>
-              </a:extLst>
-            </p:cNvPr>
-            <p:cNvSpPr/>
-            <p:nvPr/>
-          </p:nvSpPr>
-          <p:spPr>
-            <a:xfrm>
-              <a:off x="0" y="0"/>
-              <a:ext cx="4186887" cy="2199607"/>
-            </a:xfrm>
-            <a:custGeom>
-              <a:avLst/>
-              <a:gdLst/>
-              <a:ahLst/>
-              <a:cxnLst/>
-              <a:rect l="l" t="t" r="r" b="b"/>
-              <a:pathLst>
-                <a:path w="4186887" h="2199607">
-                  <a:moveTo>
-                    <a:pt x="24837" y="0"/>
-                  </a:moveTo>
-                  <a:lnTo>
-                    <a:pt x="4162050" y="0"/>
-                  </a:lnTo>
-                  <a:cubicBezTo>
-                    <a:pt x="4175767" y="0"/>
-                    <a:pt x="4186887" y="11120"/>
-                    <a:pt x="4186887" y="24837"/>
-                  </a:cubicBezTo>
-                  <a:lnTo>
-                    <a:pt x="4186887" y="2174770"/>
-                  </a:lnTo>
-                  <a:cubicBezTo>
-                    <a:pt x="4186887" y="2181357"/>
-                    <a:pt x="4184270" y="2187674"/>
-                    <a:pt x="4179612" y="2192332"/>
-                  </a:cubicBezTo>
-                  <a:cubicBezTo>
-                    <a:pt x="4174954" y="2196990"/>
-                    <a:pt x="4168637" y="2199607"/>
-                    <a:pt x="4162050" y="2199607"/>
-                  </a:cubicBezTo>
-                  <a:lnTo>
-                    <a:pt x="24837" y="2199607"/>
-                  </a:lnTo>
-                  <a:cubicBezTo>
-                    <a:pt x="11120" y="2199607"/>
-                    <a:pt x="0" y="2188487"/>
-                    <a:pt x="0" y="2174770"/>
-                  </a:cubicBezTo>
-                  <a:lnTo>
-                    <a:pt x="0" y="24837"/>
-                  </a:lnTo>
-                  <a:cubicBezTo>
-                    <a:pt x="0" y="11120"/>
-                    <a:pt x="11120" y="0"/>
-                    <a:pt x="24837" y="0"/>
-                  </a:cubicBezTo>
-                  <a:close/>
-                </a:path>
-              </a:pathLst>
-            </a:custGeom>
-            <a:solidFill>
-              <a:srgbClr val="FFFFFF">
-                <a:alpha val="60784"/>
-              </a:srgbClr>
-            </a:solidFill>
-          </p:spPr>
-          <p:txBody>
-            <a:bodyPr/>
-            <a:lstStyle/>
-            <a:p>
-              <a:endParaRPr lang="en-IN"/>
-            </a:p>
-          </p:txBody>
-        </p:sp>
-        <p:sp>
-          <p:nvSpPr>
-            <p:cNvPr id="8" name="TextBox 8">
-              <a:extLst>
-                <a:ext uri="{FF2B5EF4-FFF2-40B4-BE49-F238E27FC236}">
-                  <a16:creationId xmlns:a16="http://schemas.microsoft.com/office/drawing/2014/main" id="{EFFF5BA1-5549-6245-C5F8-51CD9F3EF19A}"/>
-                </a:ext>
-              </a:extLst>
-            </p:cNvPr>
-            <p:cNvSpPr txBox="1"/>
-            <p:nvPr/>
-          </p:nvSpPr>
-          <p:spPr>
-            <a:xfrm>
-              <a:off x="0" y="-38100"/>
-              <a:ext cx="4186887" cy="2237707"/>
-            </a:xfrm>
-            <a:prstGeom prst="rect">
-              <a:avLst/>
-            </a:prstGeom>
-          </p:spPr>
-          <p:txBody>
-            <a:bodyPr lIns="50800" tIns="50800" rIns="50800" bIns="50800" rtlCol="0" anchor="ctr"/>
-            <a:lstStyle/>
-            <a:p>
-              <a:pPr algn="ctr">
-                <a:lnSpc>
-                  <a:spcPts val="2659"/>
-                </a:lnSpc>
-                <a:spcBef>
-                  <a:spcPct val="0"/>
-                </a:spcBef>
-              </a:pPr>
-              <a:endParaRPr/>
-            </a:p>
-          </p:txBody>
-        </p:sp>
-      </p:grpSp>
-      <p:sp>
-        <p:nvSpPr>
-          <p:cNvPr id="13" name="Rectangle: Rounded Corners 12">
-            <a:extLst>
-              <a:ext uri="{FF2B5EF4-FFF2-40B4-BE49-F238E27FC236}">
-                <a16:creationId xmlns:a16="http://schemas.microsoft.com/office/drawing/2014/main" id="{5B680AFF-7EB2-4F55-D6F7-273CF6B7B0AA}"/>
-              </a:ext>
-            </a:extLst>
-          </p:cNvPr>
-          <p:cNvSpPr/>
-          <p:nvPr/>
-        </p:nvSpPr>
-        <p:spPr>
-          <a:xfrm>
-            <a:off x="7315200" y="1343614"/>
-            <a:ext cx="3505200" cy="633104"/>
-          </a:xfrm>
-          <a:prstGeom prst="roundRect">
-            <a:avLst/>
-          </a:prstGeom>
-          <a:solidFill>
-            <a:schemeClr val="bg1"/>
-          </a:solidFill>
-        </p:spPr>
-        <p:style>
-          <a:lnRef idx="2">
-            <a:schemeClr val="accent1">
-              <a:shade val="15000"/>
-            </a:schemeClr>
-          </a:lnRef>
-          <a:fillRef idx="1">
-            <a:schemeClr val="accent1"/>
-          </a:fillRef>
-          <a:effectRef idx="0">
-            <a:schemeClr val="accent1"/>
-          </a:effectRef>
-          <a:fontRef idx="minor">
-            <a:schemeClr val="lt1"/>
-          </a:fontRef>
-        </p:style>
-        <p:txBody>
-          <a:bodyPr rtlCol="0" anchor="ctr"/>
-          <a:lstStyle/>
-          <a:p>
-            <a:pPr algn="ctr"/>
-            <a:r>
-              <a:rPr lang="en-IN" sz="2800" b="1">
-                <a:solidFill>
-                  <a:schemeClr val="tx1"/>
-                </a:solidFill>
-              </a:rPr>
-              <a:t>Power BI Dashboard </a:t>
-            </a:r>
-          </a:p>
-        </p:txBody>
-      </p:sp>
-      <p:pic>
-        <p:nvPicPr>
-          <p:cNvPr id="10" name="Picture 9">
-            <a:extLst>
-              <a:ext uri="{FF2B5EF4-FFF2-40B4-BE49-F238E27FC236}">
-                <a16:creationId xmlns:a16="http://schemas.microsoft.com/office/drawing/2014/main" id="{19988AF2-5D50-9466-34C0-4635ABAC699F}"/>
-              </a:ext>
-            </a:extLst>
-          </p:cNvPr>
-          <p:cNvPicPr>
-            <a:picLocks noChangeAspect="1"/>
-          </p:cNvPicPr>
-          <p:nvPr/>
-        </p:nvPicPr>
-        <p:blipFill>
-          <a:blip r:embed="rId7"/>
-          <a:stretch>
-            <a:fillRect/>
-          </a:stretch>
-        </p:blipFill>
-        <p:spPr>
-          <a:xfrm>
-            <a:off x="1823026" y="2253344"/>
-            <a:ext cx="14846712" cy="6858957"/>
-          </a:xfrm>
-          <a:prstGeom prst="rect">
-            <a:avLst/>
-          </a:prstGeom>
-          <a:ln>
-            <a:noFill/>
-          </a:ln>
-          <a:effectLst>
-            <a:softEdge rad="112500"/>
-          </a:effectLst>
-        </p:spPr>
-      </p:pic>
-    </p:spTree>
-    <p:extLst>
-      <p:ext uri="{BB962C8B-B14F-4D97-AF65-F5344CB8AC3E}">
-        <p14:creationId xmlns:p14="http://schemas.microsoft.com/office/powerpoint/2010/main" val="1981571130"/>
-      </p:ext>
-    </p:extLst>
-  </p:cSld>
-  <p:clrMapOvr>
-    <a:masterClrMapping/>
-  </p:clrMapOvr>
-</p:sld>
-</file>
-
-<file path=ppt/slides/slide11.xml><?xml version="1.0" encoding="utf-8"?>
 <p:sld xmlns:a="http://schemas.openxmlformats.org/drawingml/2006/main" xmlns:r="http://schemas.openxmlformats.org/officeDocument/2006/relationships" xmlns:p="http://schemas.openxmlformats.org/presentationml/2006/main">
   <p:cSld>
     <p:spTree>
@@ -8844,7 +8386,7 @@
 </p:sld>
 </file>
 
-<file path=ppt/slides/slide12.xml><?xml version="1.0" encoding="utf-8"?>
+<file path=ppt/slides/slide11.xml><?xml version="1.0" encoding="utf-8"?>
 <p:sld xmlns:a="http://schemas.openxmlformats.org/drawingml/2006/main" xmlns:r="http://schemas.openxmlformats.org/officeDocument/2006/relationships" xmlns:p="http://schemas.openxmlformats.org/presentationml/2006/main">
   <p:cSld>
     <p:spTree>
@@ -9363,7 +8905,7 @@
 </p:sld>
 </file>
 
-<file path=ppt/slides/slide13.xml><?xml version="1.0" encoding="utf-8"?>
+<file path=ppt/slides/slide12.xml><?xml version="1.0" encoding="utf-8"?>
 <p:sld xmlns:a="http://schemas.openxmlformats.org/drawingml/2006/main" xmlns:r="http://schemas.openxmlformats.org/officeDocument/2006/relationships" xmlns:p="http://schemas.openxmlformats.org/presentationml/2006/main">
   <p:cSld>
     <p:spTree>
@@ -10359,7 +9901,7 @@
 </p:sld>
 </file>
 
-<file path=ppt/slides/slide14.xml><?xml version="1.0" encoding="utf-8"?>
+<file path=ppt/slides/slide13.xml><?xml version="1.0" encoding="utf-8"?>
 <p:sld xmlns:a="http://schemas.openxmlformats.org/drawingml/2006/main" xmlns:r="http://schemas.openxmlformats.org/officeDocument/2006/relationships" xmlns:p="http://schemas.openxmlformats.org/presentationml/2006/main">
   <p:cSld>
     <p:spTree>
@@ -11141,7 +10683,7 @@
 </p:sld>
 </file>
 
-<file path=ppt/slides/slide15.xml><?xml version="1.0" encoding="utf-8"?>
+<file path=ppt/slides/slide14.xml><?xml version="1.0" encoding="utf-8"?>
 <p:sld xmlns:a="http://schemas.openxmlformats.org/drawingml/2006/main" xmlns:r="http://schemas.openxmlformats.org/officeDocument/2006/relationships" xmlns:p="http://schemas.openxmlformats.org/presentationml/2006/main">
   <p:cSld>
     <p:spTree>
@@ -11783,13 +11325,13 @@
   <p:clrMapOvr>
     <a:masterClrMapping/>
   </p:clrMapOvr>
-  <mc:AlternateContent xmlns:mc="http://schemas.openxmlformats.org/markup-compatibility/2006">
-    <mc:Choice xmlns:p14="http://schemas.microsoft.com/office/powerpoint/2010/main" Requires="p14">
+  <mc:AlternateContent xmlns:mc="http://schemas.openxmlformats.org/markup-compatibility/2006" xmlns:p14="http://schemas.microsoft.com/office/powerpoint/2010/main">
+    <mc:Choice Requires="p14">
       <p:transition spd="slow" p14:dur="4400">
         <p14:honeycomb/>
       </p:transition>
     </mc:Choice>
-    <mc:Fallback>
+    <mc:Fallback xmlns="">
       <p:transition spd="slow">
         <p:fade/>
       </p:transition>
@@ -11798,7 +11340,7 @@
 </p:sld>
 </file>
 
-<file path=ppt/slides/slide16.xml><?xml version="1.0" encoding="utf-8"?>
+<file path=ppt/slides/slide15.xml><?xml version="1.0" encoding="utf-8"?>
 <p:sld xmlns:a="http://schemas.openxmlformats.org/drawingml/2006/main" xmlns:r="http://schemas.openxmlformats.org/officeDocument/2006/relationships" xmlns:p="http://schemas.openxmlformats.org/presentationml/2006/main">
   <p:cSld>
     <p:spTree>
@@ -12214,13 +11756,13 @@
   <p:clrMapOvr>
     <a:masterClrMapping/>
   </p:clrMapOvr>
-  <mc:AlternateContent xmlns:mc="http://schemas.openxmlformats.org/markup-compatibility/2006">
-    <mc:Choice xmlns:p14="http://schemas.microsoft.com/office/powerpoint/2010/main" Requires="p14">
+  <mc:AlternateContent xmlns:mc="http://schemas.openxmlformats.org/markup-compatibility/2006" xmlns:p14="http://schemas.microsoft.com/office/powerpoint/2010/main">
+    <mc:Choice Requires="p14">
       <p:transition spd="slow" p14:dur="4000">
         <p14:vortex dir="r"/>
       </p:transition>
     </mc:Choice>
-    <mc:Fallback>
+    <mc:Fallback xmlns="">
       <p:transition spd="slow">
         <p:fade/>
       </p:transition>
@@ -12993,7 +12535,7 @@
         <p:spPr>
           <a:xfrm>
             <a:off x="4765568" y="3374393"/>
-            <a:ext cx="10322032" cy="4355359"/>
+            <a:ext cx="10322032" cy="3616696"/>
           </a:xfrm>
           <a:prstGeom prst="rect">
             <a:avLst/>
@@ -13011,7 +12553,7 @@
               </a:lnSpc>
             </a:pPr>
             <a:r>
-              <a:rPr lang="en-US" sz="3200" spc="195">
+              <a:rPr lang="en-US" sz="3200" spc="195" dirty="0">
                 <a:solidFill>
                   <a:srgbClr val="0D1C38"/>
                 </a:solidFill>
@@ -13020,7 +12562,7 @@
                 <a:cs typeface="Assistant"/>
                 <a:sym typeface="Assistant"/>
               </a:rPr>
-              <a:t>1. Project Overview                  7.  Power BI Dashboard</a:t>
+              <a:t>1. Project Overview                  6.  Power BI Dashboard</a:t>
             </a:r>
           </a:p>
           <a:p>
@@ -13030,7 +12572,7 @@
               </a:lnSpc>
             </a:pPr>
             <a:r>
-              <a:rPr lang="en-US" sz="3200" spc="195">
+              <a:rPr lang="en-US" sz="3200" spc="195" dirty="0">
                 <a:solidFill>
                   <a:srgbClr val="0D1C38"/>
                 </a:solidFill>
@@ -13039,7 +12581,7 @@
                 <a:cs typeface="Assistant"/>
                 <a:sym typeface="Assistant"/>
               </a:rPr>
-              <a:t>2. Group Details                        8.  Tableau Dashboard           </a:t>
+              <a:t>2. Dataset Overview                 7.  Tableau Dashboard </a:t>
             </a:r>
           </a:p>
           <a:p>
@@ -13049,7 +12591,7 @@
               </a:lnSpc>
             </a:pPr>
             <a:r>
-              <a:rPr lang="en-US" sz="3200" spc="195">
+              <a:rPr lang="en-US" sz="3200" spc="195" dirty="0">
                 <a:solidFill>
                   <a:srgbClr val="0D1C38"/>
                 </a:solidFill>
@@ -13058,7 +12600,7 @@
                 <a:cs typeface="Assistant"/>
                 <a:sym typeface="Assistant"/>
               </a:rPr>
-              <a:t>3. Dataset Overview                 9.  Key Insights</a:t>
+              <a:t>3. Problem Statement             8.  Key Insights   </a:t>
             </a:r>
           </a:p>
           <a:p>
@@ -13068,7 +12610,7 @@
               </a:lnSpc>
             </a:pPr>
             <a:r>
-              <a:rPr lang="en-US" sz="3200" spc="195">
+              <a:rPr lang="en-US" sz="3200" spc="195" dirty="0">
                 <a:solidFill>
                   <a:srgbClr val="0D1C38"/>
                 </a:solidFill>
@@ -13077,7 +12619,7 @@
                 <a:cs typeface="Assistant"/>
                 <a:sym typeface="Assistant"/>
               </a:rPr>
-              <a:t>4. Problem Statement             10. Recommendations   </a:t>
+              <a:t>4. Excel Dashboard                   9.  Recommendations</a:t>
             </a:r>
           </a:p>
           <a:p>
@@ -13087,7 +12629,7 @@
               </a:lnSpc>
             </a:pPr>
             <a:r>
-              <a:rPr lang="en-US" sz="3200" spc="195">
+              <a:rPr lang="en-US" sz="3200" spc="195" dirty="0">
                 <a:solidFill>
                   <a:srgbClr val="0D1C38"/>
                 </a:solidFill>
@@ -13096,26 +12638,7 @@
                 <a:cs typeface="Assistant"/>
                 <a:sym typeface="Assistant"/>
               </a:rPr>
-              <a:t>5. Excel Dashboard                  11. Conclusion</a:t>
-            </a:r>
-          </a:p>
-          <a:p>
-            <a:pPr>
-              <a:lnSpc>
-                <a:spcPct val="150000"/>
-              </a:lnSpc>
-            </a:pPr>
-            <a:r>
-              <a:rPr lang="en-US" sz="3200" spc="195">
-                <a:solidFill>
-                  <a:srgbClr val="0D1C38"/>
-                </a:solidFill>
-                <a:latin typeface="Assistant"/>
-                <a:ea typeface="Assistant"/>
-                <a:cs typeface="Assistant"/>
-                <a:sym typeface="Assistant"/>
-              </a:rPr>
-              <a:t>6. MySQL Scripts</a:t>
+              <a:t>5. MySQL Scripts                      10. Conclusion</a:t>
             </a:r>
           </a:p>
         </p:txBody>
@@ -13342,10 +12865,10 @@
       </p:sp>
       <p:sp>
         <p:nvSpPr>
-          <p:cNvPr id="87" name="Freeform 16">
+          <p:cNvPr id="88" name="Freeform 16">
             <a:extLst>
               <a:ext uri="{FF2B5EF4-FFF2-40B4-BE49-F238E27FC236}">
-                <a16:creationId xmlns:a16="http://schemas.microsoft.com/office/drawing/2014/main" id="{C035C1E3-C78E-A529-5A03-ACC32F6192C2}"/>
+                <a16:creationId xmlns:a16="http://schemas.microsoft.com/office/drawing/2014/main" id="{374D116C-AD27-7076-D861-08186E194BA2}"/>
               </a:ext>
             </a:extLst>
           </p:cNvPr>
@@ -13354,7 +12877,7 @@
         </p:nvSpPr>
         <p:spPr>
           <a:xfrm>
-            <a:off x="4648200" y="7160918"/>
+            <a:off x="10247380" y="3532728"/>
             <a:ext cx="475545" cy="563931"/>
           </a:xfrm>
           <a:custGeom>
@@ -13397,10 +12920,10 @@
       </p:sp>
       <p:sp>
         <p:nvSpPr>
-          <p:cNvPr id="88" name="Freeform 16">
+          <p:cNvPr id="89" name="Freeform 16">
             <a:extLst>
               <a:ext uri="{FF2B5EF4-FFF2-40B4-BE49-F238E27FC236}">
-                <a16:creationId xmlns:a16="http://schemas.microsoft.com/office/drawing/2014/main" id="{374D116C-AD27-7076-D861-08186E194BA2}"/>
+                <a16:creationId xmlns:a16="http://schemas.microsoft.com/office/drawing/2014/main" id="{63919498-B340-D7C5-FFE8-4BA02990E0F3}"/>
               </a:ext>
             </a:extLst>
           </p:cNvPr>
@@ -13409,8 +12932,8 @@
         </p:nvSpPr>
         <p:spPr>
           <a:xfrm>
-            <a:off x="10247380" y="3532728"/>
-            <a:ext cx="475545" cy="563931"/>
+            <a:off x="10269326" y="4254994"/>
+            <a:ext cx="475545" cy="508980"/>
           </a:xfrm>
           <a:custGeom>
             <a:avLst/>
@@ -13452,10 +12975,10 @@
       </p:sp>
       <p:sp>
         <p:nvSpPr>
-          <p:cNvPr id="89" name="Freeform 16">
+          <p:cNvPr id="90" name="Freeform 16">
             <a:extLst>
               <a:ext uri="{FF2B5EF4-FFF2-40B4-BE49-F238E27FC236}">
-                <a16:creationId xmlns:a16="http://schemas.microsoft.com/office/drawing/2014/main" id="{63919498-B340-D7C5-FFE8-4BA02990E0F3}"/>
+                <a16:creationId xmlns:a16="http://schemas.microsoft.com/office/drawing/2014/main" id="{6A265801-1A54-5F5E-1236-5CD302C53D16}"/>
               </a:ext>
             </a:extLst>
           </p:cNvPr>
@@ -13464,8 +12987,8 @@
         </p:nvSpPr>
         <p:spPr>
           <a:xfrm>
-            <a:off x="10269326" y="4254994"/>
-            <a:ext cx="475545" cy="508980"/>
+            <a:off x="10269326" y="4965107"/>
+            <a:ext cx="475545" cy="563931"/>
           </a:xfrm>
           <a:custGeom>
             <a:avLst/>
@@ -13507,10 +13030,10 @@
       </p:sp>
       <p:sp>
         <p:nvSpPr>
-          <p:cNvPr id="90" name="Freeform 16">
+          <p:cNvPr id="91" name="Freeform 16">
             <a:extLst>
               <a:ext uri="{FF2B5EF4-FFF2-40B4-BE49-F238E27FC236}">
-                <a16:creationId xmlns:a16="http://schemas.microsoft.com/office/drawing/2014/main" id="{6A265801-1A54-5F5E-1236-5CD302C53D16}"/>
+                <a16:creationId xmlns:a16="http://schemas.microsoft.com/office/drawing/2014/main" id="{6DF45190-1C98-79E8-ACEB-CFD8FA5487D4}"/>
               </a:ext>
             </a:extLst>
           </p:cNvPr>
@@ -13519,8 +13042,8 @@
         </p:nvSpPr>
         <p:spPr>
           <a:xfrm>
-            <a:off x="10269326" y="4965107"/>
-            <a:ext cx="475545" cy="563931"/>
+            <a:off x="10247380" y="5744421"/>
+            <a:ext cx="616655" cy="508980"/>
           </a:xfrm>
           <a:custGeom>
             <a:avLst/>
@@ -13556,62 +13079,7 @@
           <a:bodyPr/>
           <a:lstStyle/>
           <a:p>
-            <a:endParaRPr lang="en-IN" sz="3200"/>
-          </a:p>
-        </p:txBody>
-      </p:sp>
-      <p:sp>
-        <p:nvSpPr>
-          <p:cNvPr id="91" name="Freeform 16">
-            <a:extLst>
-              <a:ext uri="{FF2B5EF4-FFF2-40B4-BE49-F238E27FC236}">
-                <a16:creationId xmlns:a16="http://schemas.microsoft.com/office/drawing/2014/main" id="{6DF45190-1C98-79E8-ACEB-CFD8FA5487D4}"/>
-              </a:ext>
-            </a:extLst>
-          </p:cNvPr>
-          <p:cNvSpPr/>
-          <p:nvPr/>
-        </p:nvSpPr>
-        <p:spPr>
-          <a:xfrm>
-            <a:off x="10247380" y="5744421"/>
-            <a:ext cx="616655" cy="508980"/>
-          </a:xfrm>
-          <a:custGeom>
-            <a:avLst/>
-            <a:gdLst/>
-            <a:ahLst/>
-            <a:cxnLst/>
-            <a:rect l="l" t="t" r="r" b="b"/>
-            <a:pathLst>
-              <a:path w="208786" h="165842">
-                <a:moveTo>
-                  <a:pt x="0" y="0"/>
-                </a:moveTo>
-                <a:lnTo>
-                  <a:pt x="208786" y="0"/>
-                </a:lnTo>
-                <a:lnTo>
-                  <a:pt x="208786" y="165842"/>
-                </a:lnTo>
-                <a:lnTo>
-                  <a:pt x="0" y="165842"/>
-                </a:lnTo>
-                <a:close/>
-              </a:path>
-            </a:pathLst>
-          </a:custGeom>
-          <a:solidFill>
-            <a:srgbClr val="78A6CB">
-              <a:alpha val="33725"/>
-            </a:srgbClr>
-          </a:solidFill>
-        </p:spPr>
-        <p:txBody>
-          <a:bodyPr/>
-          <a:lstStyle/>
-          <a:p>
-            <a:endParaRPr lang="en-IN" sz="3200"/>
+            <a:endParaRPr lang="en-IN" sz="3200" dirty="0"/>
           </a:p>
         </p:txBody>
       </p:sp>
@@ -14365,629 +13833,6 @@
   <p:cSld>
     <p:spTree>
       <p:nvGrpSpPr>
-        <p:cNvPr id="1" name="">
-          <a:extLst>
-            <a:ext uri="{FF2B5EF4-FFF2-40B4-BE49-F238E27FC236}">
-              <a16:creationId xmlns:a16="http://schemas.microsoft.com/office/drawing/2014/main" id="{3BB2CB79-5D38-09B7-197B-13E25A95D431}"/>
-            </a:ext>
-          </a:extLst>
-        </p:cNvPr>
-        <p:cNvGrpSpPr/>
-        <p:nvPr/>
-      </p:nvGrpSpPr>
-      <p:grpSpPr>
-        <a:xfrm>
-          <a:off x="0" y="0"/>
-          <a:ext cx="0" cy="0"/>
-          <a:chOff x="0" y="0"/>
-          <a:chExt cx="0" cy="0"/>
-        </a:xfrm>
-      </p:grpSpPr>
-      <p:sp>
-        <p:nvSpPr>
-          <p:cNvPr id="2" name="Freeform 2">
-            <a:extLst>
-              <a:ext uri="{FF2B5EF4-FFF2-40B4-BE49-F238E27FC236}">
-                <a16:creationId xmlns:a16="http://schemas.microsoft.com/office/drawing/2014/main" id="{4CCEE075-8E6B-F1F7-7984-9EE1071FDE1A}"/>
-              </a:ext>
-            </a:extLst>
-          </p:cNvPr>
-          <p:cNvSpPr/>
-          <p:nvPr/>
-        </p:nvSpPr>
-        <p:spPr>
-          <a:xfrm>
-            <a:off x="0" y="0"/>
-            <a:ext cx="18288000" cy="12184380"/>
-          </a:xfrm>
-          <a:custGeom>
-            <a:avLst/>
-            <a:gdLst/>
-            <a:ahLst/>
-            <a:cxnLst/>
-            <a:rect l="l" t="t" r="r" b="b"/>
-            <a:pathLst>
-              <a:path w="18288000" h="12184380">
-                <a:moveTo>
-                  <a:pt x="0" y="0"/>
-                </a:moveTo>
-                <a:lnTo>
-                  <a:pt x="18288000" y="0"/>
-                </a:lnTo>
-                <a:lnTo>
-                  <a:pt x="18288000" y="12184380"/>
-                </a:lnTo>
-                <a:lnTo>
-                  <a:pt x="0" y="12184380"/>
-                </a:lnTo>
-                <a:lnTo>
-                  <a:pt x="0" y="0"/>
-                </a:lnTo>
-                <a:close/>
-              </a:path>
-            </a:pathLst>
-          </a:custGeom>
-          <a:blipFill>
-            <a:blip r:embed="rId2">
-              <a:alphaModFix amt="26000"/>
-            </a:blip>
-            <a:stretch>
-              <a:fillRect/>
-            </a:stretch>
-          </a:blipFill>
-        </p:spPr>
-        <p:txBody>
-          <a:bodyPr/>
-          <a:lstStyle/>
-          <a:p>
-            <a:endParaRPr lang="en-IN"/>
-          </a:p>
-        </p:txBody>
-      </p:sp>
-      <p:sp>
-        <p:nvSpPr>
-          <p:cNvPr id="3" name="Freeform 3">
-            <a:extLst>
-              <a:ext uri="{FF2B5EF4-FFF2-40B4-BE49-F238E27FC236}">
-                <a16:creationId xmlns:a16="http://schemas.microsoft.com/office/drawing/2014/main" id="{DABF6946-31A4-FB4F-E58D-E7400159DD37}"/>
-              </a:ext>
-            </a:extLst>
-          </p:cNvPr>
-          <p:cNvSpPr/>
-          <p:nvPr/>
-        </p:nvSpPr>
-        <p:spPr>
-          <a:xfrm>
-            <a:off x="10775287" y="8645946"/>
-            <a:ext cx="5551100" cy="2547812"/>
-          </a:xfrm>
-          <a:custGeom>
-            <a:avLst/>
-            <a:gdLst/>
-            <a:ahLst/>
-            <a:cxnLst/>
-            <a:rect l="l" t="t" r="r" b="b"/>
-            <a:pathLst>
-              <a:path w="5551100" h="2547812">
-                <a:moveTo>
-                  <a:pt x="0" y="0"/>
-                </a:moveTo>
-                <a:lnTo>
-                  <a:pt x="5551099" y="0"/>
-                </a:lnTo>
-                <a:lnTo>
-                  <a:pt x="5551099" y="2547813"/>
-                </a:lnTo>
-                <a:lnTo>
-                  <a:pt x="0" y="2547813"/>
-                </a:lnTo>
-                <a:lnTo>
-                  <a:pt x="0" y="0"/>
-                </a:lnTo>
-                <a:close/>
-              </a:path>
-            </a:pathLst>
-          </a:custGeom>
-          <a:blipFill>
-            <a:blip>
-              <a:extLst>
-                <a:ext uri="{96DAC541-7B7A-43D3-8B79-37D633B846F1}">
-                  <asvg:svgBlip xmlns:asvg="http://schemas.microsoft.com/office/drawing/2016/SVG/main" r:embed="rId3"/>
-                </a:ext>
-              </a:extLst>
-            </a:blip>
-            <a:stretch>
-              <a:fillRect/>
-            </a:stretch>
-          </a:blipFill>
-        </p:spPr>
-        <p:txBody>
-          <a:bodyPr/>
-          <a:lstStyle/>
-          <a:p>
-            <a:endParaRPr lang="en-IN"/>
-          </a:p>
-        </p:txBody>
-      </p:sp>
-      <p:sp>
-        <p:nvSpPr>
-          <p:cNvPr id="4" name="Freeform 4">
-            <a:extLst>
-              <a:ext uri="{FF2B5EF4-FFF2-40B4-BE49-F238E27FC236}">
-                <a16:creationId xmlns:a16="http://schemas.microsoft.com/office/drawing/2014/main" id="{C07D9549-451E-6F84-30CC-C0F614CC887B}"/>
-              </a:ext>
-            </a:extLst>
-          </p:cNvPr>
-          <p:cNvSpPr/>
-          <p:nvPr/>
-        </p:nvSpPr>
-        <p:spPr>
-          <a:xfrm>
-            <a:off x="0" y="-287338"/>
-            <a:ext cx="7315200" cy="1802843"/>
-          </a:xfrm>
-          <a:custGeom>
-            <a:avLst/>
-            <a:gdLst/>
-            <a:ahLst/>
-            <a:cxnLst/>
-            <a:rect l="l" t="t" r="r" b="b"/>
-            <a:pathLst>
-              <a:path w="7315200" h="1802843">
-                <a:moveTo>
-                  <a:pt x="0" y="0"/>
-                </a:moveTo>
-                <a:lnTo>
-                  <a:pt x="7315200" y="0"/>
-                </a:lnTo>
-                <a:lnTo>
-                  <a:pt x="7315200" y="1802843"/>
-                </a:lnTo>
-                <a:lnTo>
-                  <a:pt x="0" y="1802843"/>
-                </a:lnTo>
-                <a:lnTo>
-                  <a:pt x="0" y="0"/>
-                </a:lnTo>
-                <a:close/>
-              </a:path>
-            </a:pathLst>
-          </a:custGeom>
-          <a:blipFill>
-            <a:blip>
-              <a:extLst>
-                <a:ext uri="{96DAC541-7B7A-43D3-8B79-37D633B846F1}">
-                  <asvg:svgBlip xmlns:asvg="http://schemas.microsoft.com/office/drawing/2016/SVG/main" r:embed="rId4"/>
-                </a:ext>
-              </a:extLst>
-            </a:blip>
-            <a:stretch>
-              <a:fillRect/>
-            </a:stretch>
-          </a:blipFill>
-        </p:spPr>
-        <p:txBody>
-          <a:bodyPr/>
-          <a:lstStyle/>
-          <a:p>
-            <a:endParaRPr lang="en-IN"/>
-          </a:p>
-        </p:txBody>
-      </p:sp>
-      <p:sp>
-        <p:nvSpPr>
-          <p:cNvPr id="5" name="Freeform 5">
-            <a:extLst>
-              <a:ext uri="{FF2B5EF4-FFF2-40B4-BE49-F238E27FC236}">
-                <a16:creationId xmlns:a16="http://schemas.microsoft.com/office/drawing/2014/main" id="{DFF817CF-BA17-2BC0-4840-B9815D64FB1B}"/>
-              </a:ext>
-            </a:extLst>
-          </p:cNvPr>
-          <p:cNvSpPr/>
-          <p:nvPr/>
-        </p:nvSpPr>
-        <p:spPr>
-          <a:xfrm>
-            <a:off x="13550836" y="-2599295"/>
-            <a:ext cx="7416927" cy="8229600"/>
-          </a:xfrm>
-          <a:custGeom>
-            <a:avLst/>
-            <a:gdLst/>
-            <a:ahLst/>
-            <a:cxnLst/>
-            <a:rect l="l" t="t" r="r" b="b"/>
-            <a:pathLst>
-              <a:path w="7416927" h="8229600">
-                <a:moveTo>
-                  <a:pt x="0" y="0"/>
-                </a:moveTo>
-                <a:lnTo>
-                  <a:pt x="7416927" y="0"/>
-                </a:lnTo>
-                <a:lnTo>
-                  <a:pt x="7416927" y="8229600"/>
-                </a:lnTo>
-                <a:lnTo>
-                  <a:pt x="0" y="8229600"/>
-                </a:lnTo>
-                <a:lnTo>
-                  <a:pt x="0" y="0"/>
-                </a:lnTo>
-                <a:close/>
-              </a:path>
-            </a:pathLst>
-          </a:custGeom>
-          <a:blipFill>
-            <a:blip r:embed="rId5"/>
-            <a:stretch>
-              <a:fillRect/>
-            </a:stretch>
-          </a:blipFill>
-        </p:spPr>
-        <p:txBody>
-          <a:bodyPr/>
-          <a:lstStyle/>
-          <a:p>
-            <a:endParaRPr lang="en-IN"/>
-          </a:p>
-        </p:txBody>
-      </p:sp>
-      <p:sp>
-        <p:nvSpPr>
-          <p:cNvPr id="6" name="Freeform 6">
-            <a:extLst>
-              <a:ext uri="{FF2B5EF4-FFF2-40B4-BE49-F238E27FC236}">
-                <a16:creationId xmlns:a16="http://schemas.microsoft.com/office/drawing/2014/main" id="{DF80E427-9D45-F5D8-85DE-E7ED1CF6A701}"/>
-              </a:ext>
-            </a:extLst>
-          </p:cNvPr>
-          <p:cNvSpPr/>
-          <p:nvPr/>
-        </p:nvSpPr>
-        <p:spPr>
-          <a:xfrm rot="956953">
-            <a:off x="-1464555" y="7094451"/>
-            <a:ext cx="8397773" cy="7872912"/>
-          </a:xfrm>
-          <a:custGeom>
-            <a:avLst/>
-            <a:gdLst/>
-            <a:ahLst/>
-            <a:cxnLst/>
-            <a:rect l="l" t="t" r="r" b="b"/>
-            <a:pathLst>
-              <a:path w="8397773" h="7872912">
-                <a:moveTo>
-                  <a:pt x="0" y="0"/>
-                </a:moveTo>
-                <a:lnTo>
-                  <a:pt x="8397773" y="0"/>
-                </a:lnTo>
-                <a:lnTo>
-                  <a:pt x="8397773" y="7872912"/>
-                </a:lnTo>
-                <a:lnTo>
-                  <a:pt x="0" y="7872912"/>
-                </a:lnTo>
-                <a:lnTo>
-                  <a:pt x="0" y="0"/>
-                </a:lnTo>
-                <a:close/>
-              </a:path>
-            </a:pathLst>
-          </a:custGeom>
-          <a:blipFill>
-            <a:blip>
-              <a:extLst>
-                <a:ext uri="{96DAC541-7B7A-43D3-8B79-37D633B846F1}">
-                  <asvg:svgBlip xmlns:asvg="http://schemas.microsoft.com/office/drawing/2016/SVG/main" r:embed="rId6"/>
-                </a:ext>
-              </a:extLst>
-            </a:blip>
-            <a:stretch>
-              <a:fillRect/>
-            </a:stretch>
-          </a:blipFill>
-        </p:spPr>
-        <p:txBody>
-          <a:bodyPr/>
-          <a:lstStyle/>
-          <a:p>
-            <a:endParaRPr lang="en-IN"/>
-          </a:p>
-        </p:txBody>
-      </p:sp>
-      <p:grpSp>
-        <p:nvGrpSpPr>
-          <p:cNvPr id="7" name="Group 7">
-            <a:extLst>
-              <a:ext uri="{FF2B5EF4-FFF2-40B4-BE49-F238E27FC236}">
-                <a16:creationId xmlns:a16="http://schemas.microsoft.com/office/drawing/2014/main" id="{65A63FFE-A424-7976-1C3D-8B8C6260B9FA}"/>
-              </a:ext>
-            </a:extLst>
-          </p:cNvPr>
-          <p:cNvGrpSpPr/>
-          <p:nvPr/>
-        </p:nvGrpSpPr>
-        <p:grpSpPr>
-          <a:xfrm>
-            <a:off x="1195457" y="967684"/>
-            <a:ext cx="15897086" cy="8351632"/>
-            <a:chOff x="0" y="0"/>
-            <a:chExt cx="4186887" cy="2199607"/>
-          </a:xfrm>
-        </p:grpSpPr>
-        <p:sp>
-          <p:nvSpPr>
-            <p:cNvPr id="8" name="Freeform 8">
-              <a:extLst>
-                <a:ext uri="{FF2B5EF4-FFF2-40B4-BE49-F238E27FC236}">
-                  <a16:creationId xmlns:a16="http://schemas.microsoft.com/office/drawing/2014/main" id="{CE35D6FC-A693-C0BE-1249-30ADB5F3B0B8}"/>
-                </a:ext>
-              </a:extLst>
-            </p:cNvPr>
-            <p:cNvSpPr/>
-            <p:nvPr/>
-          </p:nvSpPr>
-          <p:spPr>
-            <a:xfrm>
-              <a:off x="0" y="0"/>
-              <a:ext cx="4186887" cy="2199607"/>
-            </a:xfrm>
-            <a:custGeom>
-              <a:avLst/>
-              <a:gdLst/>
-              <a:ahLst/>
-              <a:cxnLst/>
-              <a:rect l="l" t="t" r="r" b="b"/>
-              <a:pathLst>
-                <a:path w="4186887" h="2199607">
-                  <a:moveTo>
-                    <a:pt x="24837" y="0"/>
-                  </a:moveTo>
-                  <a:lnTo>
-                    <a:pt x="4162050" y="0"/>
-                  </a:lnTo>
-                  <a:cubicBezTo>
-                    <a:pt x="4175767" y="0"/>
-                    <a:pt x="4186887" y="11120"/>
-                    <a:pt x="4186887" y="24837"/>
-                  </a:cubicBezTo>
-                  <a:lnTo>
-                    <a:pt x="4186887" y="2174770"/>
-                  </a:lnTo>
-                  <a:cubicBezTo>
-                    <a:pt x="4186887" y="2181357"/>
-                    <a:pt x="4184270" y="2187674"/>
-                    <a:pt x="4179612" y="2192332"/>
-                  </a:cubicBezTo>
-                  <a:cubicBezTo>
-                    <a:pt x="4174954" y="2196990"/>
-                    <a:pt x="4168637" y="2199607"/>
-                    <a:pt x="4162050" y="2199607"/>
-                  </a:cubicBezTo>
-                  <a:lnTo>
-                    <a:pt x="24837" y="2199607"/>
-                  </a:lnTo>
-                  <a:cubicBezTo>
-                    <a:pt x="11120" y="2199607"/>
-                    <a:pt x="0" y="2188487"/>
-                    <a:pt x="0" y="2174770"/>
-                  </a:cubicBezTo>
-                  <a:lnTo>
-                    <a:pt x="0" y="24837"/>
-                  </a:lnTo>
-                  <a:cubicBezTo>
-                    <a:pt x="0" y="11120"/>
-                    <a:pt x="11120" y="0"/>
-                    <a:pt x="24837" y="0"/>
-                  </a:cubicBezTo>
-                  <a:close/>
-                </a:path>
-              </a:pathLst>
-            </a:custGeom>
-            <a:solidFill>
-              <a:srgbClr val="FFFFFF">
-                <a:alpha val="60784"/>
-              </a:srgbClr>
-            </a:solidFill>
-          </p:spPr>
-          <p:txBody>
-            <a:bodyPr/>
-            <a:lstStyle/>
-            <a:p>
-              <a:endParaRPr lang="en-IN"/>
-            </a:p>
-          </p:txBody>
-        </p:sp>
-        <p:sp>
-          <p:nvSpPr>
-            <p:cNvPr id="9" name="TextBox 9">
-              <a:extLst>
-                <a:ext uri="{FF2B5EF4-FFF2-40B4-BE49-F238E27FC236}">
-                  <a16:creationId xmlns:a16="http://schemas.microsoft.com/office/drawing/2014/main" id="{DC0EDE31-E9EA-0965-E176-691E63E942FE}"/>
-                </a:ext>
-              </a:extLst>
-            </p:cNvPr>
-            <p:cNvSpPr txBox="1"/>
-            <p:nvPr/>
-          </p:nvSpPr>
-          <p:spPr>
-            <a:xfrm>
-              <a:off x="0" y="-38100"/>
-              <a:ext cx="4186887" cy="2237707"/>
-            </a:xfrm>
-            <a:prstGeom prst="rect">
-              <a:avLst/>
-            </a:prstGeom>
-          </p:spPr>
-          <p:txBody>
-            <a:bodyPr lIns="50800" tIns="50800" rIns="50800" bIns="50800" rtlCol="0" anchor="ctr"/>
-            <a:lstStyle/>
-            <a:p>
-              <a:pPr algn="ctr">
-                <a:lnSpc>
-                  <a:spcPts val="2659"/>
-                </a:lnSpc>
-                <a:spcBef>
-                  <a:spcPct val="0"/>
-                </a:spcBef>
-              </a:pPr>
-              <a:endParaRPr/>
-            </a:p>
-          </p:txBody>
-        </p:sp>
-      </p:grpSp>
-      <p:sp>
-        <p:nvSpPr>
-          <p:cNvPr id="10" name="TextBox 10">
-            <a:extLst>
-              <a:ext uri="{FF2B5EF4-FFF2-40B4-BE49-F238E27FC236}">
-                <a16:creationId xmlns:a16="http://schemas.microsoft.com/office/drawing/2014/main" id="{6B4A5EBE-3D51-3E11-D3F2-A9CB3E9A3752}"/>
-              </a:ext>
-            </a:extLst>
-          </p:cNvPr>
-          <p:cNvSpPr txBox="1"/>
-          <p:nvPr/>
-        </p:nvSpPr>
-        <p:spPr>
-          <a:xfrm>
-            <a:off x="2209800" y="1660166"/>
-            <a:ext cx="6680068" cy="1519327"/>
-          </a:xfrm>
-          <a:prstGeom prst="rect">
-            <a:avLst/>
-          </a:prstGeom>
-        </p:spPr>
-        <p:txBody>
-          <a:bodyPr lIns="0" tIns="0" rIns="0" bIns="0" rtlCol="0" anchor="t">
-            <a:spAutoFit/>
-          </a:bodyPr>
-          <a:lstStyle/>
-          <a:p>
-            <a:pPr algn="l">
-              <a:lnSpc>
-                <a:spcPts val="13396"/>
-              </a:lnSpc>
-              <a:spcBef>
-                <a:spcPct val="0"/>
-              </a:spcBef>
-            </a:pPr>
-            <a:r>
-              <a:rPr lang="en-US" sz="7200">
-                <a:solidFill>
-                  <a:srgbClr val="000000"/>
-                </a:solidFill>
-                <a:latin typeface="Arapey"/>
-                <a:ea typeface="Arapey"/>
-                <a:cs typeface="Arapey"/>
-                <a:sym typeface="Arapey"/>
-              </a:rPr>
-              <a:t>Group Details</a:t>
-            </a:r>
-          </a:p>
-        </p:txBody>
-      </p:sp>
-      <p:sp>
-        <p:nvSpPr>
-          <p:cNvPr id="11" name="TextBox 9">
-            <a:extLst>
-              <a:ext uri="{FF2B5EF4-FFF2-40B4-BE49-F238E27FC236}">
-                <a16:creationId xmlns:a16="http://schemas.microsoft.com/office/drawing/2014/main" id="{43724980-CF99-7F6A-C002-11001665B118}"/>
-              </a:ext>
-            </a:extLst>
-          </p:cNvPr>
-          <p:cNvSpPr txBox="1"/>
-          <p:nvPr/>
-        </p:nvSpPr>
-        <p:spPr>
-          <a:xfrm>
-            <a:off x="5414291" y="3899189"/>
-            <a:ext cx="8183987" cy="2340769"/>
-          </a:xfrm>
-          <a:prstGeom prst="rect">
-            <a:avLst/>
-          </a:prstGeom>
-          <a:noFill/>
-        </p:spPr>
-        <p:txBody>
-          <a:bodyPr lIns="0" tIns="0" rIns="0" bIns="0" rtlCol="0" anchor="t">
-            <a:spAutoFit/>
-          </a:bodyPr>
-          <a:lstStyle/>
-          <a:p>
-            <a:pPr marL="571500" indent="-571500" algn="just">
-              <a:lnSpc>
-                <a:spcPts val="4620"/>
-              </a:lnSpc>
-              <a:buFont typeface="Arial" panose="020B0604020202020204" pitchFamily="34" charset="0"/>
-              <a:buChar char="•"/>
-            </a:pPr>
-            <a:r>
-              <a:rPr lang="en-IN" sz="3800"/>
-              <a:t>S.Annapurna</a:t>
-            </a:r>
-          </a:p>
-          <a:p>
-            <a:pPr marL="571500" indent="-571500" algn="just">
-              <a:lnSpc>
-                <a:spcPts val="4620"/>
-              </a:lnSpc>
-              <a:buFont typeface="Arial" panose="020B0604020202020204" pitchFamily="34" charset="0"/>
-              <a:buChar char="•"/>
-            </a:pPr>
-            <a:r>
-              <a:rPr lang="en-IN" sz="3800"/>
-              <a:t>Praveen S</a:t>
-            </a:r>
-          </a:p>
-          <a:p>
-            <a:pPr marL="571500" indent="-571500" algn="just">
-              <a:lnSpc>
-                <a:spcPts val="4620"/>
-              </a:lnSpc>
-              <a:buFont typeface="Arial" panose="020B0604020202020204" pitchFamily="34" charset="0"/>
-              <a:buChar char="•"/>
-            </a:pPr>
-            <a:r>
-              <a:rPr lang="en-IN" sz="3800"/>
-              <a:t>Rushikesh Dayanand Parande	</a:t>
-            </a:r>
-          </a:p>
-          <a:p>
-            <a:pPr marL="571500" indent="-571500" algn="just">
-              <a:lnSpc>
-                <a:spcPts val="4620"/>
-              </a:lnSpc>
-              <a:buFont typeface="Arial" panose="020B0604020202020204" pitchFamily="34" charset="0"/>
-              <a:buChar char="•"/>
-            </a:pPr>
-            <a:r>
-              <a:rPr lang="en-IN" sz="3800"/>
-              <a:t>Jafakash Bin Mudhassir	</a:t>
-            </a:r>
-          </a:p>
-        </p:txBody>
-      </p:sp>
-    </p:spTree>
-    <p:extLst>
-      <p:ext uri="{BB962C8B-B14F-4D97-AF65-F5344CB8AC3E}">
-        <p14:creationId xmlns:p14="http://schemas.microsoft.com/office/powerpoint/2010/main" val="3163570248"/>
-      </p:ext>
-    </p:extLst>
-  </p:cSld>
-  <p:clrMapOvr>
-    <a:masterClrMapping/>
-  </p:clrMapOvr>
-</p:sld>
-</file>
-
-<file path=ppt/slides/slide5.xml><?xml version="1.0" encoding="utf-8"?>
-<p:sld xmlns:a="http://schemas.openxmlformats.org/drawingml/2006/main" xmlns:r="http://schemas.openxmlformats.org/officeDocument/2006/relationships" xmlns:p="http://schemas.openxmlformats.org/presentationml/2006/main">
-  <p:cSld>
-    <p:spTree>
-      <p:nvGrpSpPr>
         <p:cNvPr id="1" name=""/>
         <p:cNvGrpSpPr/>
         <p:nvPr/>
@@ -15588,7 +14433,7 @@
 </p:sld>
 </file>
 
-<file path=ppt/slides/slide6.xml><?xml version="1.0" encoding="utf-8"?>
+<file path=ppt/slides/slide5.xml><?xml version="1.0" encoding="utf-8"?>
 <p:sld xmlns:a="http://schemas.openxmlformats.org/drawingml/2006/main" xmlns:r="http://schemas.openxmlformats.org/officeDocument/2006/relationships" xmlns:p="http://schemas.openxmlformats.org/presentationml/2006/main">
   <p:cSld>
     <p:spTree>
@@ -16273,7 +15118,7 @@
 </p:sld>
 </file>
 
-<file path=ppt/slides/slide7.xml><?xml version="1.0" encoding="utf-8"?>
+<file path=ppt/slides/slide6.xml><?xml version="1.0" encoding="utf-8"?>
 <p:sld xmlns:a="http://schemas.openxmlformats.org/drawingml/2006/main" xmlns:r="http://schemas.openxmlformats.org/officeDocument/2006/relationships" xmlns:p="http://schemas.openxmlformats.org/presentationml/2006/main">
   <p:cSld>
     <p:spTree>
@@ -16792,7 +15637,7 @@
 </p:sld>
 </file>
 
-<file path=ppt/slides/slide8.xml><?xml version="1.0" encoding="utf-8"?>
+<file path=ppt/slides/slide7.xml><?xml version="1.0" encoding="utf-8"?>
 <p:sld xmlns:a="http://schemas.openxmlformats.org/drawingml/2006/main" xmlns:r="http://schemas.openxmlformats.org/officeDocument/2006/relationships" xmlns:p="http://schemas.openxmlformats.org/presentationml/2006/main">
   <p:cSld>
     <p:spTree>
@@ -17401,7 +16246,7 @@
 </p:sld>
 </file>
 
-<file path=ppt/slides/slide9.xml><?xml version="1.0" encoding="utf-8"?>
+<file path=ppt/slides/slide8.xml><?xml version="1.0" encoding="utf-8"?>
 <p:sld xmlns:a="http://schemas.openxmlformats.org/drawingml/2006/main" xmlns:r="http://schemas.openxmlformats.org/officeDocument/2006/relationships" xmlns:p="http://schemas.openxmlformats.org/presentationml/2006/main">
   <p:cSld>
     <p:spTree>
@@ -17917,6 +16762,531 @@
     <p:extLst>
       <p:ext uri="{BB962C8B-B14F-4D97-AF65-F5344CB8AC3E}">
         <p14:creationId xmlns:p14="http://schemas.microsoft.com/office/powerpoint/2010/main" val="3031812309"/>
+      </p:ext>
+    </p:extLst>
+  </p:cSld>
+  <p:clrMapOvr>
+    <a:masterClrMapping/>
+  </p:clrMapOvr>
+</p:sld>
+</file>
+
+<file path=ppt/slides/slide9.xml><?xml version="1.0" encoding="utf-8"?>
+<p:sld xmlns:a="http://schemas.openxmlformats.org/drawingml/2006/main" xmlns:r="http://schemas.openxmlformats.org/officeDocument/2006/relationships" xmlns:p="http://schemas.openxmlformats.org/presentationml/2006/main">
+  <p:cSld>
+    <p:spTree>
+      <p:nvGrpSpPr>
+        <p:cNvPr id="1" name="">
+          <a:extLst>
+            <a:ext uri="{FF2B5EF4-FFF2-40B4-BE49-F238E27FC236}">
+              <a16:creationId xmlns:a16="http://schemas.microsoft.com/office/drawing/2014/main" id="{02BAAE1B-BC0F-FCE8-7BF6-B113DCC9770B}"/>
+            </a:ext>
+          </a:extLst>
+        </p:cNvPr>
+        <p:cNvGrpSpPr/>
+        <p:nvPr/>
+      </p:nvGrpSpPr>
+      <p:grpSpPr>
+        <a:xfrm>
+          <a:off x="0" y="0"/>
+          <a:ext cx="0" cy="0"/>
+          <a:chOff x="0" y="0"/>
+          <a:chExt cx="0" cy="0"/>
+        </a:xfrm>
+      </p:grpSpPr>
+      <p:sp>
+        <p:nvSpPr>
+          <p:cNvPr id="2" name="Freeform 2">
+            <a:extLst>
+              <a:ext uri="{FF2B5EF4-FFF2-40B4-BE49-F238E27FC236}">
+                <a16:creationId xmlns:a16="http://schemas.microsoft.com/office/drawing/2014/main" id="{251AFD13-1E66-80A7-7A8C-A042815AE282}"/>
+              </a:ext>
+            </a:extLst>
+          </p:cNvPr>
+          <p:cNvSpPr/>
+          <p:nvPr/>
+        </p:nvSpPr>
+        <p:spPr>
+          <a:xfrm>
+            <a:off x="0" y="0"/>
+            <a:ext cx="18288000" cy="12184380"/>
+          </a:xfrm>
+          <a:custGeom>
+            <a:avLst/>
+            <a:gdLst/>
+            <a:ahLst/>
+            <a:cxnLst/>
+            <a:rect l="l" t="t" r="r" b="b"/>
+            <a:pathLst>
+              <a:path w="18288000" h="12184380">
+                <a:moveTo>
+                  <a:pt x="0" y="0"/>
+                </a:moveTo>
+                <a:lnTo>
+                  <a:pt x="18288000" y="0"/>
+                </a:lnTo>
+                <a:lnTo>
+                  <a:pt x="18288000" y="12184380"/>
+                </a:lnTo>
+                <a:lnTo>
+                  <a:pt x="0" y="12184380"/>
+                </a:lnTo>
+                <a:lnTo>
+                  <a:pt x="0" y="0"/>
+                </a:lnTo>
+                <a:close/>
+              </a:path>
+            </a:pathLst>
+          </a:custGeom>
+          <a:blipFill>
+            <a:blip r:embed="rId3">
+              <a:alphaModFix amt="26000"/>
+            </a:blip>
+            <a:stretch>
+              <a:fillRect/>
+            </a:stretch>
+          </a:blipFill>
+        </p:spPr>
+        <p:txBody>
+          <a:bodyPr/>
+          <a:lstStyle/>
+          <a:p>
+            <a:endParaRPr lang="en-IN"/>
+          </a:p>
+        </p:txBody>
+      </p:sp>
+      <p:sp>
+        <p:nvSpPr>
+          <p:cNvPr id="3" name="Freeform 3">
+            <a:extLst>
+              <a:ext uri="{FF2B5EF4-FFF2-40B4-BE49-F238E27FC236}">
+                <a16:creationId xmlns:a16="http://schemas.microsoft.com/office/drawing/2014/main" id="{BA1CEA69-6D68-4A2D-950B-24681725B69E}"/>
+              </a:ext>
+            </a:extLst>
+          </p:cNvPr>
+          <p:cNvSpPr/>
+          <p:nvPr/>
+        </p:nvSpPr>
+        <p:spPr>
+          <a:xfrm>
+            <a:off x="8173342" y="-1257300"/>
+            <a:ext cx="11109641" cy="2819072"/>
+          </a:xfrm>
+          <a:custGeom>
+            <a:avLst/>
+            <a:gdLst/>
+            <a:ahLst/>
+            <a:cxnLst/>
+            <a:rect l="l" t="t" r="r" b="b"/>
+            <a:pathLst>
+              <a:path w="11109641" h="2819072">
+                <a:moveTo>
+                  <a:pt x="0" y="0"/>
+                </a:moveTo>
+                <a:lnTo>
+                  <a:pt x="11109642" y="0"/>
+                </a:lnTo>
+                <a:lnTo>
+                  <a:pt x="11109642" y="2819071"/>
+                </a:lnTo>
+                <a:lnTo>
+                  <a:pt x="0" y="2819071"/>
+                </a:lnTo>
+                <a:lnTo>
+                  <a:pt x="0" y="0"/>
+                </a:lnTo>
+                <a:close/>
+              </a:path>
+            </a:pathLst>
+          </a:custGeom>
+          <a:blipFill>
+            <a:blip>
+              <a:extLst>
+                <a:ext uri="{96DAC541-7B7A-43D3-8B79-37D633B846F1}">
+                  <asvg:svgBlip xmlns:asvg="http://schemas.microsoft.com/office/drawing/2016/SVG/main" r:embed="rId4"/>
+                </a:ext>
+              </a:extLst>
+            </a:blip>
+            <a:stretch>
+              <a:fillRect/>
+            </a:stretch>
+          </a:blipFill>
+        </p:spPr>
+        <p:txBody>
+          <a:bodyPr/>
+          <a:lstStyle/>
+          <a:p>
+            <a:endParaRPr lang="en-IN"/>
+          </a:p>
+        </p:txBody>
+      </p:sp>
+      <p:sp>
+        <p:nvSpPr>
+          <p:cNvPr id="4" name="Freeform 4">
+            <a:extLst>
+              <a:ext uri="{FF2B5EF4-FFF2-40B4-BE49-F238E27FC236}">
+                <a16:creationId xmlns:a16="http://schemas.microsoft.com/office/drawing/2014/main" id="{4E636593-A1DD-22A9-6CED-A115106D7A55}"/>
+              </a:ext>
+            </a:extLst>
+          </p:cNvPr>
+          <p:cNvSpPr/>
+          <p:nvPr/>
+        </p:nvSpPr>
+        <p:spPr>
+          <a:xfrm rot="5519627">
+            <a:off x="15212169" y="3220447"/>
+            <a:ext cx="7280753" cy="4114800"/>
+          </a:xfrm>
+          <a:custGeom>
+            <a:avLst/>
+            <a:gdLst/>
+            <a:ahLst/>
+            <a:cxnLst/>
+            <a:rect l="l" t="t" r="r" b="b"/>
+            <a:pathLst>
+              <a:path w="7280753" h="4114800">
+                <a:moveTo>
+                  <a:pt x="0" y="0"/>
+                </a:moveTo>
+                <a:lnTo>
+                  <a:pt x="7280753" y="0"/>
+                </a:lnTo>
+                <a:lnTo>
+                  <a:pt x="7280753" y="4114800"/>
+                </a:lnTo>
+                <a:lnTo>
+                  <a:pt x="0" y="4114800"/>
+                </a:lnTo>
+                <a:lnTo>
+                  <a:pt x="0" y="0"/>
+                </a:lnTo>
+                <a:close/>
+              </a:path>
+            </a:pathLst>
+          </a:custGeom>
+          <a:blipFill>
+            <a:blip>
+              <a:extLst>
+                <a:ext uri="{96DAC541-7B7A-43D3-8B79-37D633B846F1}">
+                  <asvg:svgBlip xmlns:asvg="http://schemas.microsoft.com/office/drawing/2016/SVG/main" r:embed="rId5"/>
+                </a:ext>
+              </a:extLst>
+            </a:blip>
+            <a:stretch>
+              <a:fillRect/>
+            </a:stretch>
+          </a:blipFill>
+        </p:spPr>
+        <p:txBody>
+          <a:bodyPr/>
+          <a:lstStyle/>
+          <a:p>
+            <a:endParaRPr lang="en-IN"/>
+          </a:p>
+        </p:txBody>
+      </p:sp>
+      <p:sp>
+        <p:nvSpPr>
+          <p:cNvPr id="5" name="Freeform 5">
+            <a:extLst>
+              <a:ext uri="{FF2B5EF4-FFF2-40B4-BE49-F238E27FC236}">
+                <a16:creationId xmlns:a16="http://schemas.microsoft.com/office/drawing/2014/main" id="{A91363F6-B668-C448-FE5D-C6CAA34F9F85}"/>
+              </a:ext>
+            </a:extLst>
+          </p:cNvPr>
+          <p:cNvSpPr/>
+          <p:nvPr/>
+        </p:nvSpPr>
+        <p:spPr>
+          <a:xfrm>
+            <a:off x="0" y="6517459"/>
+            <a:ext cx="18633464" cy="9350611"/>
+          </a:xfrm>
+          <a:custGeom>
+            <a:avLst/>
+            <a:gdLst/>
+            <a:ahLst/>
+            <a:cxnLst/>
+            <a:rect l="l" t="t" r="r" b="b"/>
+            <a:pathLst>
+              <a:path w="18633464" h="9350611">
+                <a:moveTo>
+                  <a:pt x="0" y="0"/>
+                </a:moveTo>
+                <a:lnTo>
+                  <a:pt x="18633464" y="0"/>
+                </a:lnTo>
+                <a:lnTo>
+                  <a:pt x="18633464" y="9350611"/>
+                </a:lnTo>
+                <a:lnTo>
+                  <a:pt x="0" y="9350611"/>
+                </a:lnTo>
+                <a:lnTo>
+                  <a:pt x="0" y="0"/>
+                </a:lnTo>
+                <a:close/>
+              </a:path>
+            </a:pathLst>
+          </a:custGeom>
+          <a:blipFill>
+            <a:blip>
+              <a:extLst>
+                <a:ext uri="{96DAC541-7B7A-43D3-8B79-37D633B846F1}">
+                  <asvg:svgBlip xmlns:asvg="http://schemas.microsoft.com/office/drawing/2016/SVG/main" r:embed="rId6"/>
+                </a:ext>
+              </a:extLst>
+            </a:blip>
+            <a:stretch>
+              <a:fillRect/>
+            </a:stretch>
+          </a:blipFill>
+        </p:spPr>
+        <p:txBody>
+          <a:bodyPr/>
+          <a:lstStyle/>
+          <a:p>
+            <a:endParaRPr lang="en-IN"/>
+          </a:p>
+        </p:txBody>
+      </p:sp>
+      <p:grpSp>
+        <p:nvGrpSpPr>
+          <p:cNvPr id="6" name="Group 6">
+            <a:extLst>
+              <a:ext uri="{FF2B5EF4-FFF2-40B4-BE49-F238E27FC236}">
+                <a16:creationId xmlns:a16="http://schemas.microsoft.com/office/drawing/2014/main" id="{66F6CE9B-3B8E-38AA-FA5C-64B1B014F9BD}"/>
+              </a:ext>
+            </a:extLst>
+          </p:cNvPr>
+          <p:cNvGrpSpPr/>
+          <p:nvPr/>
+        </p:nvGrpSpPr>
+        <p:grpSpPr>
+          <a:xfrm>
+            <a:off x="1195457" y="967684"/>
+            <a:ext cx="15897086" cy="8351632"/>
+            <a:chOff x="0" y="0"/>
+            <a:chExt cx="4186887" cy="2199607"/>
+          </a:xfrm>
+        </p:grpSpPr>
+        <p:sp>
+          <p:nvSpPr>
+            <p:cNvPr id="7" name="Freeform 7">
+              <a:extLst>
+                <a:ext uri="{FF2B5EF4-FFF2-40B4-BE49-F238E27FC236}">
+                  <a16:creationId xmlns:a16="http://schemas.microsoft.com/office/drawing/2014/main" id="{06175BBC-F34F-407E-1A5C-381E991D734A}"/>
+                </a:ext>
+              </a:extLst>
+            </p:cNvPr>
+            <p:cNvSpPr/>
+            <p:nvPr/>
+          </p:nvSpPr>
+          <p:spPr>
+            <a:xfrm>
+              <a:off x="0" y="0"/>
+              <a:ext cx="4186887" cy="2199607"/>
+            </a:xfrm>
+            <a:custGeom>
+              <a:avLst/>
+              <a:gdLst/>
+              <a:ahLst/>
+              <a:cxnLst/>
+              <a:rect l="l" t="t" r="r" b="b"/>
+              <a:pathLst>
+                <a:path w="4186887" h="2199607">
+                  <a:moveTo>
+                    <a:pt x="24837" y="0"/>
+                  </a:moveTo>
+                  <a:lnTo>
+                    <a:pt x="4162050" y="0"/>
+                  </a:lnTo>
+                  <a:cubicBezTo>
+                    <a:pt x="4175767" y="0"/>
+                    <a:pt x="4186887" y="11120"/>
+                    <a:pt x="4186887" y="24837"/>
+                  </a:cubicBezTo>
+                  <a:lnTo>
+                    <a:pt x="4186887" y="2174770"/>
+                  </a:lnTo>
+                  <a:cubicBezTo>
+                    <a:pt x="4186887" y="2181357"/>
+                    <a:pt x="4184270" y="2187674"/>
+                    <a:pt x="4179612" y="2192332"/>
+                  </a:cubicBezTo>
+                  <a:cubicBezTo>
+                    <a:pt x="4174954" y="2196990"/>
+                    <a:pt x="4168637" y="2199607"/>
+                    <a:pt x="4162050" y="2199607"/>
+                  </a:cubicBezTo>
+                  <a:lnTo>
+                    <a:pt x="24837" y="2199607"/>
+                  </a:lnTo>
+                  <a:cubicBezTo>
+                    <a:pt x="11120" y="2199607"/>
+                    <a:pt x="0" y="2188487"/>
+                    <a:pt x="0" y="2174770"/>
+                  </a:cubicBezTo>
+                  <a:lnTo>
+                    <a:pt x="0" y="24837"/>
+                  </a:lnTo>
+                  <a:cubicBezTo>
+                    <a:pt x="0" y="11120"/>
+                    <a:pt x="11120" y="0"/>
+                    <a:pt x="24837" y="0"/>
+                  </a:cubicBezTo>
+                  <a:close/>
+                </a:path>
+              </a:pathLst>
+            </a:custGeom>
+            <a:solidFill>
+              <a:srgbClr val="FFFFFF">
+                <a:alpha val="60784"/>
+              </a:srgbClr>
+            </a:solidFill>
+          </p:spPr>
+          <p:txBody>
+            <a:bodyPr/>
+            <a:lstStyle/>
+            <a:p>
+              <a:endParaRPr lang="en-IN"/>
+            </a:p>
+          </p:txBody>
+        </p:sp>
+        <p:sp>
+          <p:nvSpPr>
+            <p:cNvPr id="8" name="TextBox 8">
+              <a:extLst>
+                <a:ext uri="{FF2B5EF4-FFF2-40B4-BE49-F238E27FC236}">
+                  <a16:creationId xmlns:a16="http://schemas.microsoft.com/office/drawing/2014/main" id="{EFFF5BA1-5549-6245-C5F8-51CD9F3EF19A}"/>
+                </a:ext>
+              </a:extLst>
+            </p:cNvPr>
+            <p:cNvSpPr txBox="1"/>
+            <p:nvPr/>
+          </p:nvSpPr>
+          <p:spPr>
+            <a:xfrm>
+              <a:off x="0" y="-38100"/>
+              <a:ext cx="4186887" cy="2237707"/>
+            </a:xfrm>
+            <a:prstGeom prst="rect">
+              <a:avLst/>
+            </a:prstGeom>
+          </p:spPr>
+          <p:txBody>
+            <a:bodyPr lIns="50800" tIns="50800" rIns="50800" bIns="50800" rtlCol="0" anchor="ctr"/>
+            <a:lstStyle/>
+            <a:p>
+              <a:pPr algn="ctr">
+                <a:lnSpc>
+                  <a:spcPts val="2659"/>
+                </a:lnSpc>
+                <a:spcBef>
+                  <a:spcPct val="0"/>
+                </a:spcBef>
+              </a:pPr>
+              <a:endParaRPr/>
+            </a:p>
+          </p:txBody>
+        </p:sp>
+      </p:grpSp>
+      <p:sp>
+        <p:nvSpPr>
+          <p:cNvPr id="13" name="Rectangle: Rounded Corners 12">
+            <a:extLst>
+              <a:ext uri="{FF2B5EF4-FFF2-40B4-BE49-F238E27FC236}">
+                <a16:creationId xmlns:a16="http://schemas.microsoft.com/office/drawing/2014/main" id="{5B680AFF-7EB2-4F55-D6F7-273CF6B7B0AA}"/>
+              </a:ext>
+            </a:extLst>
+          </p:cNvPr>
+          <p:cNvSpPr/>
+          <p:nvPr/>
+        </p:nvSpPr>
+        <p:spPr>
+          <a:xfrm>
+            <a:off x="7315200" y="1343614"/>
+            <a:ext cx="3505200" cy="633104"/>
+          </a:xfrm>
+          <a:prstGeom prst="roundRect">
+            <a:avLst/>
+          </a:prstGeom>
+          <a:solidFill>
+            <a:schemeClr val="bg1"/>
+          </a:solidFill>
+        </p:spPr>
+        <p:style>
+          <a:lnRef idx="2">
+            <a:schemeClr val="accent1">
+              <a:shade val="15000"/>
+            </a:schemeClr>
+          </a:lnRef>
+          <a:fillRef idx="1">
+            <a:schemeClr val="accent1"/>
+          </a:fillRef>
+          <a:effectRef idx="0">
+            <a:schemeClr val="accent1"/>
+          </a:effectRef>
+          <a:fontRef idx="minor">
+            <a:schemeClr val="lt1"/>
+          </a:fontRef>
+        </p:style>
+        <p:txBody>
+          <a:bodyPr rtlCol="0" anchor="ctr"/>
+          <a:lstStyle/>
+          <a:p>
+            <a:pPr algn="ctr"/>
+            <a:r>
+              <a:rPr lang="en-IN" sz="2800" b="1">
+                <a:solidFill>
+                  <a:schemeClr val="tx1"/>
+                </a:solidFill>
+              </a:rPr>
+              <a:t>Power BI Dashboard </a:t>
+            </a:r>
+          </a:p>
+        </p:txBody>
+      </p:sp>
+      <p:pic>
+        <p:nvPicPr>
+          <p:cNvPr id="10" name="Picture 9">
+            <a:extLst>
+              <a:ext uri="{FF2B5EF4-FFF2-40B4-BE49-F238E27FC236}">
+                <a16:creationId xmlns:a16="http://schemas.microsoft.com/office/drawing/2014/main" id="{19988AF2-5D50-9466-34C0-4635ABAC699F}"/>
+              </a:ext>
+            </a:extLst>
+          </p:cNvPr>
+          <p:cNvPicPr>
+            <a:picLocks noChangeAspect="1"/>
+          </p:cNvPicPr>
+          <p:nvPr/>
+        </p:nvPicPr>
+        <p:blipFill>
+          <a:blip r:embed="rId7"/>
+          <a:stretch>
+            <a:fillRect/>
+          </a:stretch>
+        </p:blipFill>
+        <p:spPr>
+          <a:xfrm>
+            <a:off x="1823026" y="2253344"/>
+            <a:ext cx="14846712" cy="6858957"/>
+          </a:xfrm>
+          <a:prstGeom prst="rect">
+            <a:avLst/>
+          </a:prstGeom>
+          <a:ln>
+            <a:noFill/>
+          </a:ln>
+          <a:effectLst>
+            <a:softEdge rad="112500"/>
+          </a:effectLst>
+        </p:spPr>
+      </p:pic>
+    </p:spTree>
+    <p:extLst>
+      <p:ext uri="{BB962C8B-B14F-4D97-AF65-F5344CB8AC3E}">
+        <p14:creationId xmlns:p14="http://schemas.microsoft.com/office/powerpoint/2010/main" val="1981571130"/>
       </p:ext>
     </p:extLst>
   </p:cSld>
